--- a/slides/Claude_session3.pptx
+++ b/slides/Claude_session3.pptx
@@ -13,6 +13,7 @@
     <p:sldId id="261" r:id="rId12"/>
     <p:sldId id="262" r:id="rId13"/>
     <p:sldId id="263" r:id="rId14"/>
+    <p:sldId id="275" r:id="rId26"/>
     <p:sldId id="264" r:id="rId15"/>
     <p:sldId id="265" r:id="rId16"/>
     <p:sldId id="266" r:id="rId17"/>
@@ -4850,7 +4851,7 @@
                 </a:solidFill>
                 <a:latin typeface="Helvetica Neue"/>
               </a:rPr>
-              <a:t>10 / 19</a:t>
+              <a:t>11 / 20</a:t>
             </a:r>
           </a:p>
         </p:txBody>
@@ -6078,7 +6079,7 @@
                 </a:solidFill>
                 <a:latin typeface="Helvetica Neue"/>
               </a:rPr>
-              <a:t>11 / 19</a:t>
+              <a:t>12 / 20</a:t>
             </a:r>
           </a:p>
         </p:txBody>
@@ -6209,7 +6210,7 @@
                 </a:solidFill>
                 <a:latin typeface="Helvetica Neue"/>
               </a:rPr>
-              <a:t>12 / 19</a:t>
+              <a:t>13 / 20</a:t>
             </a:r>
           </a:p>
         </p:txBody>
@@ -6445,7 +6446,7 @@
                 </a:solidFill>
                 <a:latin typeface="Helvetica Neue"/>
               </a:rPr>
-              <a:t>13 / 19</a:t>
+              <a:t>14 / 20</a:t>
             </a:r>
           </a:p>
         </p:txBody>
@@ -7419,7 +7420,7 @@
                 </a:solidFill>
                 <a:latin typeface="Helvetica Neue"/>
               </a:rPr>
-              <a:t>14 / 19</a:t>
+              <a:t>15 / 20</a:t>
             </a:r>
           </a:p>
         </p:txBody>
@@ -8603,7 +8604,7 @@
                 </a:solidFill>
                 <a:latin typeface="Helvetica Neue"/>
               </a:rPr>
-              <a:t>15 / 19</a:t>
+              <a:t>16 / 20</a:t>
             </a:r>
           </a:p>
         </p:txBody>
@@ -10482,7 +10483,7 @@
                 </a:solidFill>
                 <a:latin typeface="Helvetica Neue"/>
               </a:rPr>
-              <a:t>16 / 19</a:t>
+              <a:t>17 / 20</a:t>
             </a:r>
           </a:p>
         </p:txBody>
@@ -12289,7 +12290,7 @@
                 </a:solidFill>
                 <a:latin typeface="Helvetica Neue"/>
               </a:rPr>
-              <a:t>17 / 19</a:t>
+              <a:t>18 / 20</a:t>
             </a:r>
           </a:p>
         </p:txBody>
@@ -13241,7 +13242,7 @@
                 </a:solidFill>
                 <a:latin typeface="Helvetica Neue"/>
               </a:rPr>
-              <a:t>18 / 19</a:t>
+              <a:t>19 / 20</a:t>
             </a:r>
           </a:p>
         </p:txBody>
@@ -14203,7 +14204,7 @@
                 </a:solidFill>
                 <a:latin typeface="Helvetica Neue"/>
               </a:rPr>
-              <a:t>19 / 19</a:t>
+              <a:t>20 / 20</a:t>
             </a:r>
           </a:p>
         </p:txBody>
@@ -15198,7 +15199,1110 @@
                 </a:solidFill>
                 <a:latin typeface="Helvetica Neue"/>
               </a:rPr>
-              <a:t>2 / 19</a:t>
+              <a:t>2 / 20</a:t>
+            </a:r>
+          </a:p>
+        </p:txBody>
+      </p:sp>
+    </p:spTree>
+  </p:cSld>
+  <p:clrMapOvr>
+    <a:masterClrMapping/>
+  </p:clrMapOvr>
+</p:sld>
+</file>
+
+<file path=ppt/slides/slide20.xml><?xml version="1.0" encoding="utf-8"?>
+<p:sld xmlns:a="http://schemas.openxmlformats.org/drawingml/2006/main" xmlns:p="http://schemas.openxmlformats.org/presentationml/2006/main" xmlns:r="http://schemas.openxmlformats.org/officeDocument/2006/relationships">
+  <p:cSld>
+    <p:bg>
+      <p:bgPr>
+        <a:solidFill>
+          <a:srgbClr val="1B1918"/>
+        </a:solidFill>
+        <a:effectLst/>
+      </p:bgPr>
+    </p:bg>
+    <p:spTree>
+      <p:nvGrpSpPr>
+        <p:cNvPr id="1" name=""/>
+        <p:cNvGrpSpPr/>
+        <p:nvPr/>
+      </p:nvGrpSpPr>
+      <p:grpSpPr/>
+      <p:sp>
+        <p:nvSpPr>
+          <p:cNvPr id="2" name="TextBox 1"/>
+          <p:cNvSpPr txBox="1"/>
+          <p:nvPr/>
+        </p:nvSpPr>
+        <p:spPr>
+          <a:xfrm>
+            <a:off x="731520" y="365760"/>
+            <a:ext cx="8000000" cy="274320"/>
+          </a:xfrm>
+          <a:prstGeom prst="rect">
+            <a:avLst/>
+          </a:prstGeom>
+          <a:noFill/>
+        </p:spPr>
+        <p:txBody>
+          <a:bodyPr wrap="square">
+            <a:spAutoFit/>
+          </a:bodyPr>
+          <a:lstStyle/>
+          <a:p>
+            <a:pPr algn="l"/>
+            <a:r>
+              <a:rPr sz="1200" b="1">
+                <a:solidFill>
+                  <a:srgbClr val="D97757"/>
+                </a:solidFill>
+                <a:latin typeface="Helvetica Neue"/>
+              </a:rPr>
+              <a:t>PART 1 — Skills &amp; サブエージェント</a:t>
+            </a:r>
+          </a:p>
+        </p:txBody>
+      </p:sp>
+      <p:sp>
+        <p:nvSpPr>
+          <p:cNvPr id="3" name="TextBox 2"/>
+          <p:cNvSpPr txBox="1"/>
+          <p:nvPr/>
+        </p:nvSpPr>
+        <p:spPr>
+          <a:xfrm>
+            <a:off x="731520" y="548640"/>
+            <a:ext cx="10000000" cy="548640"/>
+          </a:xfrm>
+          <a:prstGeom prst="rect">
+            <a:avLst/>
+          </a:prstGeom>
+          <a:noFill/>
+        </p:spPr>
+        <p:txBody>
+          <a:bodyPr wrap="square">
+            <a:spAutoFit/>
+          </a:bodyPr>
+          <a:lstStyle/>
+          <a:p>
+            <a:pPr algn="l"/>
+            <a:r>
+              <a:rPr sz="2800" b="1">
+                <a:solidFill>
+                  <a:srgbClr val="FAF9F5"/>
+                </a:solidFill>
+                <a:latin typeface="Hiragino Sans"/>
+              </a:rPr>
+              <a:t>最初から使えるコマンド &amp; スキル</a:t>
+            </a:r>
+          </a:p>
+        </p:txBody>
+      </p:sp>
+      <p:sp>
+        <p:nvSpPr>
+          <p:cNvPr id="4" name="TextBox 3"/>
+          <p:cNvSpPr txBox="1"/>
+          <p:nvPr/>
+        </p:nvSpPr>
+        <p:spPr>
+          <a:xfrm>
+            <a:off x="731520" y="1050000"/>
+            <a:ext cx="5120640" cy="320000"/>
+          </a:xfrm>
+          <a:prstGeom prst="rect">
+            <a:avLst/>
+          </a:prstGeom>
+          <a:noFill/>
+        </p:spPr>
+        <p:txBody>
+          <a:bodyPr wrap="square">
+            <a:spAutoFit/>
+          </a:bodyPr>
+          <a:lstStyle/>
+          <a:p>
+            <a:pPr algn="l"/>
+            <a:r>
+              <a:rPr sz="1300" b="1">
+                <a:solidFill>
+                  <a:srgbClr val="6A9BCC"/>
+                </a:solidFill>
+                <a:latin typeface="Hiragino Sans"/>
+              </a:rPr>
+              <a:t>ビルトインコマンド（固定ロジック）</a:t>
+            </a:r>
+          </a:p>
+        </p:txBody>
+      </p:sp>
+      <p:sp>
+        <p:nvSpPr>
+          <p:cNvPr id="5" name="TextBox 4"/>
+          <p:cNvSpPr txBox="1"/>
+          <p:nvPr/>
+        </p:nvSpPr>
+        <p:spPr>
+          <a:xfrm>
+            <a:off x="731520" y="1320000"/>
+            <a:ext cx="5120640" cy="250000"/>
+          </a:xfrm>
+          <a:prstGeom prst="rect">
+            <a:avLst/>
+          </a:prstGeom>
+          <a:noFill/>
+        </p:spPr>
+        <p:txBody>
+          <a:bodyPr wrap="square">
+            <a:spAutoFit/>
+          </a:bodyPr>
+          <a:lstStyle/>
+          <a:p>
+            <a:pPr algn="l"/>
+            <a:r>
+              <a:rPr sz="1000" b="0">
+                <a:solidFill>
+                  <a:srgbClr val="B0AEA5"/>
+                </a:solidFill>
+                <a:latin typeface="Hiragino Sans"/>
+              </a:rPr>
+              <a:t>即座に結果を返す</a:t>
+            </a:r>
+          </a:p>
+        </p:txBody>
+      </p:sp>
+      <p:graphicFrame>
+        <p:nvGraphicFramePr>
+          <p:cNvPr id="6" name="Table 5"/>
+          <p:cNvGraphicFramePr>
+            <a:graphicFrameLocks noGrp="1"/>
+          </p:cNvGraphicFramePr>
+          <p:nvPr/>
+        </p:nvGraphicFramePr>
+        <p:xfrm>
+          <a:off x="731520" y="1580000"/>
+          <a:ext cx="5120640" cy="1820000"/>
+        </p:xfrm>
+        <a:graphic>
+          <a:graphicData uri="http://schemas.openxmlformats.org/drawingml/2006/table">
+            <a:tbl>
+              <a:tblPr firstRow="1" bandRow="1">
+                <a:tableStyleId>{5C22544A-7EE6-4342-B048-85BDC9FD1C3A}</a:tableStyleId>
+              </a:tblPr>
+              <a:tblGrid>
+                <a:gridCol w="1828800"/>
+                <a:gridCol w="3291840"/>
+              </a:tblGrid>
+              <a:tr h="260000">
+                <a:tc>
+                  <a:txBody>
+                    <a:bodyPr/>
+                    <a:lstStyle/>
+                    <a:p>
+                      <a:pPr algn="l"/>
+                      <a:r>
+                        <a:rPr sz="1000" b="1">
+                          <a:solidFill>
+                            <a:srgbClr val="FAF9F5"/>
+                          </a:solidFill>
+                          <a:latin typeface="Hiragino Sans"/>
+                        </a:rPr>
+                        <a:t>コマンド</a:t>
+                      </a:r>
+                    </a:p>
+                  </a:txBody>
+                  <a:tcPr anchor="ctr" marL="91440" marR="91440" marT="45720" marB="45720">
+                    <a:solidFill>
+                      <a:srgbClr val="3A3632"/>
+                    </a:solidFill>
+                  </a:tcPr>
+                </a:tc>
+                <a:tc>
+                  <a:txBody>
+                    <a:bodyPr/>
+                    <a:lstStyle/>
+                    <a:p>
+                      <a:pPr algn="l"/>
+                      <a:r>
+                        <a:rPr sz="1000" b="1">
+                          <a:solidFill>
+                            <a:srgbClr val="FAF9F5"/>
+                          </a:solidFill>
+                          <a:latin typeface="Hiragino Sans"/>
+                        </a:rPr>
+                        <a:t>用途</a:t>
+                      </a:r>
+                    </a:p>
+                  </a:txBody>
+                  <a:tcPr anchor="ctr" marL="91440" marR="91440" marT="45720" marB="45720">
+                    <a:solidFill>
+                      <a:srgbClr val="3A3632"/>
+                    </a:solidFill>
+                  </a:tcPr>
+                </a:tc>
+              </a:tr>
+              <a:tr h="260000">
+                <a:tc>
+                  <a:txBody>
+                    <a:bodyPr/>
+                    <a:lstStyle/>
+                    <a:p>
+                      <a:pPr algn="l"/>
+                      <a:r>
+                        <a:rPr sz="1000" b="0">
+                          <a:solidFill>
+                            <a:srgbClr val="D97757"/>
+                          </a:solidFill>
+                          <a:latin typeface="SF Mono"/>
+                        </a:rPr>
+                        <a:t>/security-review</a:t>
+                      </a:r>
+                    </a:p>
+                  </a:txBody>
+                  <a:tcPr anchor="ctr" marL="91440" marR="91440" marT="45720" marB="45720">
+                    <a:solidFill>
+                      <a:srgbClr val="2D2926"/>
+                    </a:solidFill>
+                  </a:tcPr>
+                </a:tc>
+                <a:tc>
+                  <a:txBody>
+                    <a:bodyPr/>
+                    <a:lstStyle/>
+                    <a:p>
+                      <a:pPr algn="l"/>
+                      <a:r>
+                        <a:rPr sz="1000" b="0">
+                          <a:solidFill>
+                            <a:srgbClr val="E0DED8"/>
+                          </a:solidFill>
+                          <a:latin typeface="Hiragino Sans"/>
+                        </a:rPr>
+                        <a:t>セキュリティ脆弱性分析</a:t>
+                      </a:r>
+                    </a:p>
+                  </a:txBody>
+                  <a:tcPr anchor="ctr" marL="91440" marR="91440" marT="45720" marB="45720">
+                    <a:solidFill>
+                      <a:srgbClr val="2D2926"/>
+                    </a:solidFill>
+                  </a:tcPr>
+                </a:tc>
+              </a:tr>
+              <a:tr h="260000">
+                <a:tc>
+                  <a:txBody>
+                    <a:bodyPr/>
+                    <a:lstStyle/>
+                    <a:p>
+                      <a:pPr algn="l"/>
+                      <a:r>
+                        <a:rPr sz="1000" b="0">
+                          <a:solidFill>
+                            <a:srgbClr val="D97757"/>
+                          </a:solidFill>
+                          <a:latin typeface="SF Mono"/>
+                        </a:rPr>
+                        <a:t>/pr-comments</a:t>
+                      </a:r>
+                    </a:p>
+                  </a:txBody>
+                  <a:tcPr anchor="ctr" marL="91440" marR="91440" marT="45720" marB="45720">
+                    <a:solidFill>
+                      <a:srgbClr val="2D2926"/>
+                    </a:solidFill>
+                  </a:tcPr>
+                </a:tc>
+                <a:tc>
+                  <a:txBody>
+                    <a:bodyPr/>
+                    <a:lstStyle/>
+                    <a:p>
+                      <a:pPr algn="l"/>
+                      <a:r>
+                        <a:rPr sz="1000" b="0">
+                          <a:solidFill>
+                            <a:srgbClr val="E0DED8"/>
+                          </a:solidFill>
+                          <a:latin typeface="Hiragino Sans"/>
+                        </a:rPr>
+                        <a:t>PRコメントを取得・表示</a:t>
+                      </a:r>
+                    </a:p>
+                  </a:txBody>
+                  <a:tcPr anchor="ctr" marL="91440" marR="91440" marT="45720" marB="45720">
+                    <a:solidFill>
+                      <a:srgbClr val="2D2926"/>
+                    </a:solidFill>
+                  </a:tcPr>
+                </a:tc>
+              </a:tr>
+              <a:tr h="260000">
+                <a:tc>
+                  <a:txBody>
+                    <a:bodyPr/>
+                    <a:lstStyle/>
+                    <a:p>
+                      <a:pPr algn="l"/>
+                      <a:r>
+                        <a:rPr sz="1000" b="0">
+                          <a:solidFill>
+                            <a:srgbClr val="D97757"/>
+                          </a:solidFill>
+                          <a:latin typeface="SF Mono"/>
+                        </a:rPr>
+                        <a:t>/diff</a:t>
+                      </a:r>
+                    </a:p>
+                  </a:txBody>
+                  <a:tcPr anchor="ctr" marL="91440" marR="91440" marT="45720" marB="45720">
+                    <a:solidFill>
+                      <a:srgbClr val="2D2926"/>
+                    </a:solidFill>
+                  </a:tcPr>
+                </a:tc>
+                <a:tc>
+                  <a:txBody>
+                    <a:bodyPr/>
+                    <a:lstStyle/>
+                    <a:p>
+                      <a:pPr algn="l"/>
+                      <a:r>
+                        <a:rPr sz="1000" b="0">
+                          <a:solidFill>
+                            <a:srgbClr val="E0DED8"/>
+                          </a:solidFill>
+                          <a:latin typeface="Hiragino Sans"/>
+                        </a:rPr>
+                        <a:t>差分のインタラクティブビューア</a:t>
+                      </a:r>
+                    </a:p>
+                  </a:txBody>
+                  <a:tcPr anchor="ctr" marL="91440" marR="91440" marT="45720" marB="45720">
+                    <a:solidFill>
+                      <a:srgbClr val="2D2926"/>
+                    </a:solidFill>
+                  </a:tcPr>
+                </a:tc>
+              </a:tr>
+              <a:tr h="260000">
+                <a:tc>
+                  <a:txBody>
+                    <a:bodyPr/>
+                    <a:lstStyle/>
+                    <a:p>
+                      <a:pPr algn="l"/>
+                      <a:r>
+                        <a:rPr sz="1000" b="0">
+                          <a:solidFill>
+                            <a:srgbClr val="D97757"/>
+                          </a:solidFill>
+                          <a:latin typeface="SF Mono"/>
+                        </a:rPr>
+                        <a:t>/compact</a:t>
+                      </a:r>
+                    </a:p>
+                  </a:txBody>
+                  <a:tcPr anchor="ctr" marL="91440" marR="91440" marT="45720" marB="45720">
+                    <a:solidFill>
+                      <a:srgbClr val="2D2926"/>
+                    </a:solidFill>
+                  </a:tcPr>
+                </a:tc>
+                <a:tc>
+                  <a:txBody>
+                    <a:bodyPr/>
+                    <a:lstStyle/>
+                    <a:p>
+                      <a:pPr algn="l"/>
+                      <a:r>
+                        <a:rPr sz="1000" b="0">
+                          <a:solidFill>
+                            <a:srgbClr val="E0DED8"/>
+                          </a:solidFill>
+                          <a:latin typeface="Hiragino Sans"/>
+                        </a:rPr>
+                        <a:t>コンテキストを圧縮</a:t>
+                      </a:r>
+                    </a:p>
+                  </a:txBody>
+                  <a:tcPr anchor="ctr" marL="91440" marR="91440" marT="45720" marB="45720">
+                    <a:solidFill>
+                      <a:srgbClr val="2D2926"/>
+                    </a:solidFill>
+                  </a:tcPr>
+                </a:tc>
+              </a:tr>
+              <a:tr h="260000">
+                <a:tc>
+                  <a:txBody>
+                    <a:bodyPr/>
+                    <a:lstStyle/>
+                    <a:p>
+                      <a:pPr algn="l"/>
+                      <a:r>
+                        <a:rPr sz="1000" b="0">
+                          <a:solidFill>
+                            <a:srgbClr val="D97757"/>
+                          </a:solidFill>
+                          <a:latin typeface="SF Mono"/>
+                        </a:rPr>
+                        <a:t>/init</a:t>
+                      </a:r>
+                    </a:p>
+                  </a:txBody>
+                  <a:tcPr anchor="ctr" marL="91440" marR="91440" marT="45720" marB="45720">
+                    <a:solidFill>
+                      <a:srgbClr val="2D2926"/>
+                    </a:solidFill>
+                  </a:tcPr>
+                </a:tc>
+                <a:tc>
+                  <a:txBody>
+                    <a:bodyPr/>
+                    <a:lstStyle/>
+                    <a:p>
+                      <a:pPr algn="l"/>
+                      <a:r>
+                        <a:rPr sz="1000" b="0">
+                          <a:solidFill>
+                            <a:srgbClr val="E0DED8"/>
+                          </a:solidFill>
+                          <a:latin typeface="Hiragino Sans"/>
+                        </a:rPr>
+                        <a:t>CLAUDE.md を対話的に初期化</a:t>
+                      </a:r>
+                    </a:p>
+                  </a:txBody>
+                  <a:tcPr anchor="ctr" marL="91440" marR="91440" marT="45720" marB="45720">
+                    <a:solidFill>
+                      <a:srgbClr val="2D2926"/>
+                    </a:solidFill>
+                  </a:tcPr>
+                </a:tc>
+              </a:tr>
+              <a:tr h="260000">
+                <a:tc>
+                  <a:txBody>
+                    <a:bodyPr/>
+                    <a:lstStyle/>
+                    <a:p>
+                      <a:pPr algn="l"/>
+                      <a:r>
+                        <a:rPr sz="1000" b="0">
+                          <a:solidFill>
+                            <a:srgbClr val="D97757"/>
+                          </a:solidFill>
+                          <a:latin typeface="SF Mono"/>
+                        </a:rPr>
+                        <a:t>他50以上</a:t>
+                      </a:r>
+                    </a:p>
+                  </a:txBody>
+                  <a:tcPr anchor="ctr" marL="91440" marR="91440" marT="45720" marB="45720">
+                    <a:solidFill>
+                      <a:srgbClr val="2D2926"/>
+                    </a:solidFill>
+                  </a:tcPr>
+                </a:tc>
+                <a:tc>
+                  <a:txBody>
+                    <a:bodyPr/>
+                    <a:lstStyle/>
+                    <a:p>
+                      <a:pPr algn="l"/>
+                      <a:r>
+                        <a:rPr sz="1000" b="0">
+                          <a:solidFill>
+                            <a:srgbClr val="E0DED8"/>
+                          </a:solidFill>
+                          <a:latin typeface="Hiragino Sans"/>
+                        </a:rPr>
+                        <a:t>/help で一覧表示</a:t>
+                      </a:r>
+                    </a:p>
+                  </a:txBody>
+                  <a:tcPr anchor="ctr" marL="91440" marR="91440" marT="45720" marB="45720">
+                    <a:solidFill>
+                      <a:srgbClr val="2D2926"/>
+                    </a:solidFill>
+                  </a:tcPr>
+                </a:tc>
+              </a:tr>
+            </a:tbl>
+          </a:graphicData>
+        </a:graphic>
+      </p:graphicFrame>
+      <p:sp>
+        <p:nvSpPr>
+          <p:cNvPr id="7" name="TextBox 6"/>
+          <p:cNvSpPr txBox="1"/>
+          <p:nvPr/>
+        </p:nvSpPr>
+        <p:spPr>
+          <a:xfrm>
+            <a:off x="6035040" y="1050000"/>
+            <a:ext cx="5120640" cy="320000"/>
+          </a:xfrm>
+          <a:prstGeom prst="rect">
+            <a:avLst/>
+          </a:prstGeom>
+          <a:noFill/>
+        </p:spPr>
+        <p:txBody>
+          <a:bodyPr wrap="square">
+            <a:spAutoFit/>
+          </a:bodyPr>
+          <a:lstStyle/>
+          <a:p>
+            <a:pPr algn="l"/>
+            <a:r>
+              <a:rPr sz="1300" b="1">
+                <a:solidFill>
+                  <a:srgbClr val="7BC9A0"/>
+                </a:solidFill>
+                <a:latin typeface="Hiragino Sans"/>
+              </a:rPr>
+              <a:t>バンドルスキル（プロンプトベース）</a:t>
+            </a:r>
+          </a:p>
+        </p:txBody>
+      </p:sp>
+      <p:sp>
+        <p:nvSpPr>
+          <p:cNvPr id="8" name="TextBox 7"/>
+          <p:cNvSpPr txBox="1"/>
+          <p:nvPr/>
+        </p:nvSpPr>
+        <p:spPr>
+          <a:xfrm>
+            <a:off x="6035040" y="1320000"/>
+            <a:ext cx="5120640" cy="250000"/>
+          </a:xfrm>
+          <a:prstGeom prst="rect">
+            <a:avLst/>
+          </a:prstGeom>
+          <a:noFill/>
+        </p:spPr>
+        <p:txBody>
+          <a:bodyPr wrap="square">
+            <a:spAutoFit/>
+          </a:bodyPr>
+          <a:lstStyle/>
+          <a:p>
+            <a:pPr algn="l"/>
+            <a:r>
+              <a:rPr sz="1000" b="0">
+                <a:solidFill>
+                  <a:srgbClr val="B0AEA5"/>
+                </a:solidFill>
+                <a:latin typeface="Hiragino Sans"/>
+              </a:rPr>
+              <a:t>エージェントを起動し複雑なタスクを遂行</a:t>
+            </a:r>
+          </a:p>
+        </p:txBody>
+      </p:sp>
+      <p:graphicFrame>
+        <p:nvGraphicFramePr>
+          <p:cNvPr id="9" name="Table 8"/>
+          <p:cNvGraphicFramePr>
+            <a:graphicFrameLocks noGrp="1"/>
+          </p:cNvGraphicFramePr>
+          <p:nvPr/>
+        </p:nvGraphicFramePr>
+        <p:xfrm>
+          <a:off x="6035040" y="1580000"/>
+          <a:ext cx="5120640" cy="1560000"/>
+        </p:xfrm>
+        <a:graphic>
+          <a:graphicData uri="http://schemas.openxmlformats.org/drawingml/2006/table">
+            <a:tbl>
+              <a:tblPr firstRow="1" bandRow="1">
+                <a:tableStyleId>{5C22544A-7EE6-4342-B048-85BDC9FD1C3A}</a:tableStyleId>
+              </a:tblPr>
+              <a:tblGrid>
+                <a:gridCol w="1600200"/>
+                <a:gridCol w="3520440"/>
+              </a:tblGrid>
+              <a:tr h="260000">
+                <a:tc>
+                  <a:txBody>
+                    <a:bodyPr/>
+                    <a:lstStyle/>
+                    <a:p>
+                      <a:pPr algn="l"/>
+                      <a:r>
+                        <a:rPr sz="1000" b="1">
+                          <a:solidFill>
+                            <a:srgbClr val="FAF9F5"/>
+                          </a:solidFill>
+                          <a:latin typeface="Hiragino Sans"/>
+                        </a:rPr>
+                        <a:t>スキル</a:t>
+                      </a:r>
+                    </a:p>
+                  </a:txBody>
+                  <a:tcPr anchor="ctr" marL="91440" marR="91440" marT="45720" marB="45720">
+                    <a:solidFill>
+                      <a:srgbClr val="3A3632"/>
+                    </a:solidFill>
+                  </a:tcPr>
+                </a:tc>
+                <a:tc>
+                  <a:txBody>
+                    <a:bodyPr/>
+                    <a:lstStyle/>
+                    <a:p>
+                      <a:pPr algn="l"/>
+                      <a:r>
+                        <a:rPr sz="1000" b="1">
+                          <a:solidFill>
+                            <a:srgbClr val="FAF9F5"/>
+                          </a:solidFill>
+                          <a:latin typeface="Hiragino Sans"/>
+                        </a:rPr>
+                        <a:t>用途</a:t>
+                      </a:r>
+                    </a:p>
+                  </a:txBody>
+                  <a:tcPr anchor="ctr" marL="91440" marR="91440" marT="45720" marB="45720">
+                    <a:solidFill>
+                      <a:srgbClr val="3A3632"/>
+                    </a:solidFill>
+                  </a:tcPr>
+                </a:tc>
+              </a:tr>
+              <a:tr h="260000">
+                <a:tc>
+                  <a:txBody>
+                    <a:bodyPr/>
+                    <a:lstStyle/>
+                    <a:p>
+                      <a:pPr algn="l"/>
+                      <a:r>
+                        <a:rPr sz="1000" b="0">
+                          <a:solidFill>
+                            <a:srgbClr val="7BC9A0"/>
+                          </a:solidFill>
+                          <a:latin typeface="SF Mono"/>
+                        </a:rPr>
+                        <a:t>/batch</a:t>
+                      </a:r>
+                    </a:p>
+                  </a:txBody>
+                  <a:tcPr anchor="ctr" marL="91440" marR="91440" marT="45720" marB="45720">
+                    <a:solidFill>
+                      <a:srgbClr val="2D2926"/>
+                    </a:solidFill>
+                  </a:tcPr>
+                </a:tc>
+                <a:tc>
+                  <a:txBody>
+                    <a:bodyPr/>
+                    <a:lstStyle/>
+                    <a:p>
+                      <a:pPr algn="l"/>
+                      <a:r>
+                        <a:rPr sz="1000" b="0">
+                          <a:solidFill>
+                            <a:srgbClr val="E0DED8"/>
+                          </a:solidFill>
+                          <a:latin typeface="Hiragino Sans"/>
+                        </a:rPr>
+                        <a:t>大規模変更をworktreeで並列実行→PR作成</a:t>
+                      </a:r>
+                    </a:p>
+                  </a:txBody>
+                  <a:tcPr anchor="ctr" marL="91440" marR="91440" marT="45720" marB="45720">
+                    <a:solidFill>
+                      <a:srgbClr val="2D2926"/>
+                    </a:solidFill>
+                  </a:tcPr>
+                </a:tc>
+              </a:tr>
+              <a:tr h="260000">
+                <a:tc>
+                  <a:txBody>
+                    <a:bodyPr/>
+                    <a:lstStyle/>
+                    <a:p>
+                      <a:pPr algn="l"/>
+                      <a:r>
+                        <a:rPr sz="1000" b="0">
+                          <a:solidFill>
+                            <a:srgbClr val="7BC9A0"/>
+                          </a:solidFill>
+                          <a:latin typeface="SF Mono"/>
+                        </a:rPr>
+                        <a:t>/simplify</a:t>
+                      </a:r>
+                    </a:p>
+                  </a:txBody>
+                  <a:tcPr anchor="ctr" marL="91440" marR="91440" marT="45720" marB="45720">
+                    <a:solidFill>
+                      <a:srgbClr val="2D2926"/>
+                    </a:solidFill>
+                  </a:tcPr>
+                </a:tc>
+                <a:tc>
+                  <a:txBody>
+                    <a:bodyPr/>
+                    <a:lstStyle/>
+                    <a:p>
+                      <a:pPr algn="l"/>
+                      <a:r>
+                        <a:rPr sz="1000" b="0">
+                          <a:solidFill>
+                            <a:srgbClr val="E0DED8"/>
+                          </a:solidFill>
+                          <a:latin typeface="Hiragino Sans"/>
+                        </a:rPr>
+                        <a:t>3エージェントが品質・効率・再利用性を検証</a:t>
+                      </a:r>
+                    </a:p>
+                  </a:txBody>
+                  <a:tcPr anchor="ctr" marL="91440" marR="91440" marT="45720" marB="45720">
+                    <a:solidFill>
+                      <a:srgbClr val="2D2926"/>
+                    </a:solidFill>
+                  </a:tcPr>
+                </a:tc>
+              </a:tr>
+              <a:tr h="260000">
+                <a:tc>
+                  <a:txBody>
+                    <a:bodyPr/>
+                    <a:lstStyle/>
+                    <a:p>
+                      <a:pPr algn="l"/>
+                      <a:r>
+                        <a:rPr sz="1000" b="0">
+                          <a:solidFill>
+                            <a:srgbClr val="7BC9A0"/>
+                          </a:solidFill>
+                          <a:latin typeface="SF Mono"/>
+                        </a:rPr>
+                        <a:t>/loop</a:t>
+                      </a:r>
+                    </a:p>
+                  </a:txBody>
+                  <a:tcPr anchor="ctr" marL="91440" marR="91440" marT="45720" marB="45720">
+                    <a:solidFill>
+                      <a:srgbClr val="2D2926"/>
+                    </a:solidFill>
+                  </a:tcPr>
+                </a:tc>
+                <a:tc>
+                  <a:txBody>
+                    <a:bodyPr/>
+                    <a:lstStyle/>
+                    <a:p>
+                      <a:pPr algn="l"/>
+                      <a:r>
+                        <a:rPr sz="1000" b="0">
+                          <a:solidFill>
+                            <a:srgbClr val="E0DED8"/>
+                          </a:solidFill>
+                          <a:latin typeface="Hiragino Sans"/>
+                        </a:rPr>
+                        <a:t>定期的にプロンプト実行（cron対応）</a:t>
+                      </a:r>
+                    </a:p>
+                  </a:txBody>
+                  <a:tcPr anchor="ctr" marL="91440" marR="91440" marT="45720" marB="45720">
+                    <a:solidFill>
+                      <a:srgbClr val="2D2926"/>
+                    </a:solidFill>
+                  </a:tcPr>
+                </a:tc>
+              </a:tr>
+              <a:tr h="260000">
+                <a:tc>
+                  <a:txBody>
+                    <a:bodyPr/>
+                    <a:lstStyle/>
+                    <a:p>
+                      <a:pPr algn="l"/>
+                      <a:r>
+                        <a:rPr sz="1000" b="0">
+                          <a:solidFill>
+                            <a:srgbClr val="7BC9A0"/>
+                          </a:solidFill>
+                          <a:latin typeface="SF Mono"/>
+                        </a:rPr>
+                        <a:t>/debug</a:t>
+                      </a:r>
+                    </a:p>
+                  </a:txBody>
+                  <a:tcPr anchor="ctr" marL="91440" marR="91440" marT="45720" marB="45720">
+                    <a:solidFill>
+                      <a:srgbClr val="2D2926"/>
+                    </a:solidFill>
+                  </a:tcPr>
+                </a:tc>
+                <a:tc>
+                  <a:txBody>
+                    <a:bodyPr/>
+                    <a:lstStyle/>
+                    <a:p>
+                      <a:pPr algn="l"/>
+                      <a:r>
+                        <a:rPr sz="1000" b="0">
+                          <a:solidFill>
+                            <a:srgbClr val="E0DED8"/>
+                          </a:solidFill>
+                          <a:latin typeface="Hiragino Sans"/>
+                        </a:rPr>
+                        <a:t>デバッグログを分析</a:t>
+                      </a:r>
+                    </a:p>
+                  </a:txBody>
+                  <a:tcPr anchor="ctr" marL="91440" marR="91440" marT="45720" marB="45720">
+                    <a:solidFill>
+                      <a:srgbClr val="2D2926"/>
+                    </a:solidFill>
+                  </a:tcPr>
+                </a:tc>
+              </a:tr>
+              <a:tr h="260000">
+                <a:tc>
+                  <a:txBody>
+                    <a:bodyPr/>
+                    <a:lstStyle/>
+                    <a:p>
+                      <a:pPr algn="l"/>
+                      <a:r>
+                        <a:rPr sz="1000" b="0">
+                          <a:solidFill>
+                            <a:srgbClr val="7BC9A0"/>
+                          </a:solidFill>
+                          <a:latin typeface="SF Mono"/>
+                        </a:rPr>
+                        <a:t>/claude-api</a:t>
+                      </a:r>
+                    </a:p>
+                  </a:txBody>
+                  <a:tcPr anchor="ctr" marL="91440" marR="91440" marT="45720" marB="45720">
+                    <a:solidFill>
+                      <a:srgbClr val="2D2926"/>
+                    </a:solidFill>
+                  </a:tcPr>
+                </a:tc>
+                <a:tc>
+                  <a:txBody>
+                    <a:bodyPr/>
+                    <a:lstStyle/>
+                    <a:p>
+                      <a:pPr algn="l"/>
+                      <a:r>
+                        <a:rPr sz="1000" b="0">
+                          <a:solidFill>
+                            <a:srgbClr val="E0DED8"/>
+                          </a:solidFill>
+                          <a:latin typeface="Hiragino Sans"/>
+                        </a:rPr>
+                        <a:t>API / SDKリファレンスを自動読み込み</a:t>
+                      </a:r>
+                    </a:p>
+                  </a:txBody>
+                  <a:tcPr anchor="ctr" marL="91440" marR="91440" marT="45720" marB="45720">
+                    <a:solidFill>
+                      <a:srgbClr val="2D2926"/>
+                    </a:solidFill>
+                  </a:tcPr>
+                </a:tc>
+              </a:tr>
+            </a:tbl>
+          </a:graphicData>
+        </a:graphic>
+      </p:graphicFrame>
+      <p:sp>
+        <p:nvSpPr>
+          <p:cNvPr id="10" name="Rectangle 9"/>
+          <p:cNvSpPr/>
+          <p:nvPr/>
+        </p:nvSpPr>
+        <p:spPr>
+          <a:xfrm>
+            <a:off x="731520" y="5800000"/>
+            <a:ext cx="10728960" cy="457200"/>
+          </a:xfrm>
+          <a:prstGeom prst="rect">
+            <a:avLst/>
+          </a:prstGeom>
+          <a:solidFill>
+            <a:srgbClr val="2C2A26"/>
+          </a:solidFill>
+          <a:ln>
+            <a:noFill/>
+          </a:ln>
+        </p:spPr>
+        <p:style>
+          <a:lnRef idx="1">
+            <a:schemeClr val="accent1"/>
+          </a:lnRef>
+          <a:fillRef idx="3">
+            <a:schemeClr val="accent1"/>
+          </a:fillRef>
+          <a:effectRef idx="2">
+            <a:schemeClr val="accent1"/>
+          </a:effectRef>
+          <a:fontRef idx="minor">
+            <a:schemeClr val="lt1"/>
+          </a:fontRef>
+        </p:style>
+        <p:txBody>
+          <a:bodyPr rtlCol="0" anchor="ctr"/>
+          <a:lstStyle/>
+          <a:p>
+            <a:pPr algn="ctr"/>
+          </a:p>
+        </p:txBody>
+      </p:sp>
+      <p:sp>
+        <p:nvSpPr>
+          <p:cNvPr id="11" name="Rectangle 10"/>
+          <p:cNvSpPr/>
+          <p:nvPr/>
+        </p:nvSpPr>
+        <p:spPr>
+          <a:xfrm>
+            <a:off x="731520" y="5800000"/>
+            <a:ext cx="54864" cy="457200"/>
+          </a:xfrm>
+          <a:prstGeom prst="rect">
+            <a:avLst/>
+          </a:prstGeom>
+          <a:solidFill>
+            <a:srgbClr val="D97757"/>
+          </a:solidFill>
+          <a:ln>
+            <a:noFill/>
+          </a:ln>
+        </p:spPr>
+        <p:style>
+          <a:lnRef idx="1">
+            <a:schemeClr val="accent1"/>
+          </a:lnRef>
+          <a:fillRef idx="3">
+            <a:schemeClr val="accent1"/>
+          </a:fillRef>
+          <a:effectRef idx="2">
+            <a:schemeClr val="accent1"/>
+          </a:effectRef>
+          <a:fontRef idx="minor">
+            <a:schemeClr val="lt1"/>
+          </a:fontRef>
+        </p:style>
+        <p:txBody>
+          <a:bodyPr rtlCol="0" anchor="ctr"/>
+          <a:lstStyle/>
+          <a:p>
+            <a:pPr algn="ctr"/>
+          </a:p>
+        </p:txBody>
+      </p:sp>
+      <p:sp>
+        <p:nvSpPr>
+          <p:cNvPr id="12" name="TextBox 11"/>
+          <p:cNvSpPr txBox="1"/>
+          <p:nvPr/>
+        </p:nvSpPr>
+        <p:spPr>
+          <a:xfrm>
+            <a:off x="914400" y="5891440"/>
+            <a:ext cx="10400000" cy="365760"/>
+          </a:xfrm>
+          <a:prstGeom prst="rect">
+            <a:avLst/>
+          </a:prstGeom>
+          <a:noFill/>
+        </p:spPr>
+        <p:txBody>
+          <a:bodyPr wrap="square">
+            <a:spAutoFit/>
+          </a:bodyPr>
+          <a:lstStyle/>
+          <a:p>
+            <a:pPr algn="l"/>
+            <a:r>
+              <a:rPr sz="1400" b="1">
+                <a:solidFill>
+                  <a:srgbClr val="D97757"/>
+                </a:solidFill>
+                <a:latin typeface="Hiragino Sans"/>
+              </a:rPr>
+              <a:t>特に /batch と /simplify が強力 → PART 3 のworktreeで再登場</a:t>
+            </a:r>
+          </a:p>
+        </p:txBody>
+      </p:sp>
+      <p:sp>
+        <p:nvSpPr>
+          <p:cNvPr id="13" name="TextBox 12"/>
+          <p:cNvSpPr txBox="1"/>
+          <p:nvPr/>
+        </p:nvSpPr>
+        <p:spPr>
+          <a:xfrm>
+            <a:off x="731520" y="6350000"/>
+            <a:ext cx="10728960" cy="274320"/>
+          </a:xfrm>
+          <a:prstGeom prst="rect">
+            <a:avLst/>
+          </a:prstGeom>
+          <a:noFill/>
+        </p:spPr>
+        <p:txBody>
+          <a:bodyPr wrap="square">
+            <a:spAutoFit/>
+          </a:bodyPr>
+          <a:lstStyle/>
+          <a:p>
+            <a:pPr algn="l"/>
+            <a:r>
+              <a:rPr sz="1200" b="0">
+                <a:solidFill>
+                  <a:srgbClr val="B0AEA5"/>
+                </a:solidFill>
+                <a:latin typeface="Hiragino Sans"/>
+              </a:rPr>
+              <a:t>→ コマンドは固定ロジック、スキルはプロンプトベースでエージェント起動可能</a:t>
+            </a:r>
+          </a:p>
+        </p:txBody>
+      </p:sp>
+      <p:sp>
+        <p:nvSpPr>
+          <p:cNvPr id="14" name="TextBox 13"/>
+          <p:cNvSpPr txBox="1"/>
+          <p:nvPr/>
+        </p:nvSpPr>
+        <p:spPr>
+          <a:xfrm>
+            <a:off x="10992000" y="6458000"/>
+            <a:ext cx="900000" cy="274320"/>
+          </a:xfrm>
+          <a:prstGeom prst="rect">
+            <a:avLst/>
+          </a:prstGeom>
+          <a:noFill/>
+        </p:spPr>
+        <p:txBody>
+          <a:bodyPr wrap="square">
+            <a:spAutoFit/>
+          </a:bodyPr>
+          <a:lstStyle/>
+          <a:p>
+            <a:pPr algn="r"/>
+            <a:r>
+              <a:rPr sz="1100" b="0">
+                <a:solidFill>
+                  <a:srgbClr val="B0AEA5"/>
+                </a:solidFill>
+                <a:latin typeface="Helvetica Neue"/>
+              </a:rPr>
+              <a:t>10 / 20</a:t>
             </a:r>
           </a:p>
         </p:txBody>
@@ -15434,7 +16538,7 @@
                 </a:solidFill>
                 <a:latin typeface="Helvetica Neue"/>
               </a:rPr>
-              <a:t>3 / 19</a:t>
+              <a:t>3 / 20</a:t>
             </a:r>
           </a:p>
         </p:txBody>
@@ -16730,7 +17834,7 @@
                 </a:solidFill>
                 <a:latin typeface="Helvetica Neue"/>
               </a:rPr>
-              <a:t>4 / 19</a:t>
+              <a:t>4 / 20</a:t>
             </a:r>
           </a:p>
         </p:txBody>
@@ -17742,7 +18846,7 @@
                 </a:solidFill>
                 <a:latin typeface="Helvetica Neue"/>
               </a:rPr>
-              <a:t>5 / 19</a:t>
+              <a:t>5 / 20</a:t>
             </a:r>
           </a:p>
         </p:txBody>
@@ -19009,7 +20113,7 @@
                 </a:solidFill>
                 <a:latin typeface="Helvetica Neue"/>
               </a:rPr>
-              <a:t>6 / 19</a:t>
+              <a:t>6 / 20</a:t>
             </a:r>
           </a:p>
         </p:txBody>
@@ -20811,7 +21915,7 @@
                 </a:solidFill>
                 <a:latin typeface="Helvetica Neue"/>
               </a:rPr>
-              <a:t>7 / 19</a:t>
+              <a:t>7 / 20</a:t>
             </a:r>
           </a:p>
         </p:txBody>
@@ -21047,7 +22151,7 @@
                 </a:solidFill>
                 <a:latin typeface="Helvetica Neue"/>
               </a:rPr>
-              <a:t>8 / 19</a:t>
+              <a:t>9 / 20</a:t>
             </a:r>
           </a:p>
         </p:txBody>
@@ -21790,7 +22894,7 @@
                 </a:solidFill>
                 <a:latin typeface="Helvetica Neue"/>
               </a:rPr>
-              <a:t>9 / 19</a:t>
+              <a:t>10 / 20</a:t>
             </a:r>
           </a:p>
         </p:txBody>
